--- a/dataset/guides_final/SEC/guide/IT-SEC-004_보안 예외 신청·정책 안내 가이드.pptx
+++ b/dataset/guides_final/SEC/guide/IT-SEC-004_보안 예외 신청·정책 안내 가이드.pptx
@@ -3240,7 +3240,7 @@
                 <a:ea typeface="Malgun Gothic"/>
                 <a:cs typeface="Malgun Gothic"/>
               </a:rPr>
-              <a:t>한화시스템 ICT 임직원 IT 안내 · 정보보안</a:t>
+              <a:t>가상 ICT 기업 임직원 IT 안내 · 정보보안</a:t>
             </a:r>
           </a:p>
         </p:txBody>
@@ -3472,7 +3472,7 @@
                 <a:ea typeface="Malgun Gothic"/>
                 <a:cs typeface="Malgun Gothic"/>
               </a:rPr>
-              <a:t>© HANWHA SYSTEMS ICT · IT-SEC-004 · 사내 일반</a:t>
+              <a:t>© 가상 ICT 기업 · IT-SEC-004 · 사내 일반</a:t>
             </a:r>
           </a:p>
         </p:txBody>
@@ -5169,7 +5169,7 @@
                 <a:ea typeface="Malgun Gothic"/>
                 <a:cs typeface="Malgun Gothic"/>
               </a:rPr>
-              <a:t>© HANWHA SYSTEMS ICT · IT-SEC-004 · 사내 일반</a:t>
+              <a:t>© 가상 ICT 기업 · IT-SEC-004 · 사내 일반</a:t>
             </a:r>
           </a:p>
         </p:txBody>
@@ -7304,7 +7304,7 @@
                 <a:ea typeface="Malgun Gothic"/>
                 <a:cs typeface="Malgun Gothic"/>
               </a:rPr>
-              <a:t>© HANWHA SYSTEMS ICT · IT-SEC-004 · 사내 일반</a:t>
+              <a:t>© 가상 ICT 기업 · IT-SEC-004 · 사내 일반</a:t>
             </a:r>
           </a:p>
         </p:txBody>
@@ -8716,7 +8716,7 @@
                 <a:ea typeface="Malgun Gothic"/>
                 <a:cs typeface="Malgun Gothic"/>
               </a:rPr>
-              <a:t>© HANWHA SYSTEMS ICT · IT-SEC-004 · 사내 일반</a:t>
+              <a:t>© 가상 ICT 기업 · IT-SEC-004 · 사내 일반</a:t>
             </a:r>
           </a:p>
         </p:txBody>
@@ -10709,7 +10709,7 @@
                 <a:ea typeface="Malgun Gothic"/>
                 <a:cs typeface="Malgun Gothic"/>
               </a:rPr>
-              <a:t>© HANWHA SYSTEMS ICT · IT-SEC-004 · 사내 일반</a:t>
+              <a:t>© 가상 ICT 기업 · IT-SEC-004 · 사내 일반</a:t>
             </a:r>
           </a:p>
         </p:txBody>
@@ -12258,7 +12258,7 @@
                 <a:ea typeface="Malgun Gothic"/>
                 <a:cs typeface="Malgun Gothic"/>
               </a:rPr>
-              <a:t>© HANWHA SYSTEMS ICT · IT-SEC-004 · 사내 일반</a:t>
+              <a:t>© 가상 ICT 기업 · IT-SEC-004 · 사내 일반</a:t>
             </a:r>
           </a:p>
         </p:txBody>
@@ -14229,7 +14229,7 @@
                 <a:ea typeface="Malgun Gothic"/>
                 <a:cs typeface="Malgun Gothic"/>
               </a:rPr>
-              <a:t>© HANWHA SYSTEMS ICT · IT-SEC-004 · 사내 일반</a:t>
+              <a:t>© 가상 ICT 기업 · IT-SEC-004 · 사내 일반</a:t>
             </a:r>
           </a:p>
         </p:txBody>
@@ -15641,7 +15641,7 @@
                 <a:ea typeface="Malgun Gothic"/>
                 <a:cs typeface="Malgun Gothic"/>
               </a:rPr>
-              <a:t>© HANWHA SYSTEMS ICT · IT-SEC-004 · 사내 일반</a:t>
+              <a:t>© 가상 ICT 기업 · IT-SEC-004 · 사내 일반</a:t>
             </a:r>
           </a:p>
         </p:txBody>
@@ -17658,7 +17658,7 @@
                 <a:ea typeface="Malgun Gothic"/>
                 <a:cs typeface="Malgun Gothic"/>
               </a:rPr>
-              <a:t>© HANWHA SYSTEMS ICT · IT-SEC-004 · 사내 일반</a:t>
+              <a:t>© 가상 ICT 기업 · IT-SEC-004 · 사내 일반</a:t>
             </a:r>
           </a:p>
         </p:txBody>
@@ -19091,7 +19091,7 @@
                 <a:ea typeface="Malgun Gothic"/>
                 <a:cs typeface="Malgun Gothic"/>
               </a:rPr>
-              <a:t>© HANWHA SYSTEMS ICT · IT-SEC-004 · 사내 일반</a:t>
+              <a:t>© 가상 ICT 기업 · IT-SEC-004 · 사내 일반</a:t>
             </a:r>
           </a:p>
         </p:txBody>
@@ -19339,7 +19339,7 @@
                 <a:ea typeface="Malgun Gothic"/>
                 <a:cs typeface="Malgun Gothic"/>
               </a:rPr>
-              <a:t>© HANWHA SYSTEMS ICT · IT-SEC-004 · 사내 일반</a:t>
+              <a:t>© 가상 ICT 기업 · IT-SEC-004 · 사내 일반</a:t>
             </a:r>
           </a:p>
         </p:txBody>
@@ -21144,7 +21144,7 @@
                 <a:ea typeface="Malgun Gothic"/>
                 <a:cs typeface="Malgun Gothic"/>
               </a:rPr>
-              <a:t>© HANWHA SYSTEMS ICT · IT-SEC-004 · 사내 일반</a:t>
+              <a:t>© 가상 ICT 기업 · IT-SEC-004 · 사내 일반</a:t>
             </a:r>
           </a:p>
         </p:txBody>
@@ -22085,7 +22085,7 @@
                 <a:ea typeface="Malgun Gothic"/>
                 <a:cs typeface="Malgun Gothic"/>
               </a:rPr>
-              <a:t>© HANWHA SYSTEMS ICT · IT-SEC-004 · 사내 일반</a:t>
+              <a:t>© 가상 ICT 기업 · IT-SEC-004 · 사내 일반</a:t>
             </a:r>
           </a:p>
         </p:txBody>
@@ -22333,7 +22333,7 @@
                 <a:ea typeface="Malgun Gothic"/>
                 <a:cs typeface="Malgun Gothic"/>
               </a:rPr>
-              <a:t>© HANWHA SYSTEMS ICT · IT-SEC-004 · 사내 일반</a:t>
+              <a:t>© 가상 ICT 기업 · IT-SEC-004 · 사내 일반</a:t>
             </a:r>
           </a:p>
         </p:txBody>
@@ -23084,7 +23084,7 @@
                 <a:ea typeface="Malgun Gothic"/>
                 <a:cs typeface="Malgun Gothic"/>
               </a:rPr>
-              <a:t>© HANWHA SYSTEMS ICT · IT-SEC-004 · 사내 일반</a:t>
+              <a:t>© 가상 ICT 기업 · IT-SEC-004 · 사내 일반</a:t>
             </a:r>
           </a:p>
         </p:txBody>
@@ -23332,7 +23332,7 @@
                 <a:ea typeface="Malgun Gothic"/>
                 <a:cs typeface="Malgun Gothic"/>
               </a:rPr>
-              <a:t>© HANWHA SYSTEMS ICT · IT-SEC-004 · 사내 일반</a:t>
+              <a:t>© 가상 ICT 기업 · IT-SEC-004 · 사내 일반</a:t>
             </a:r>
           </a:p>
         </p:txBody>
@@ -23844,7 +23844,7 @@
                           <a:ea typeface="Malgun Gothic"/>
                           <a:cs typeface="Malgun Gothic"/>
                         </a:rPr>
-                        <a:t>사내 IT 포털(hanwha-admin) 상단 [챗봇 문의]</a:t>
+                        <a:t>사내 IT 포털 상단 [챗봇 문의]</a:t>
                       </a:r>
                     </a:p>
                   </a:txBody>
@@ -24536,7 +24536,7 @@
                           <a:ea typeface="Malgun Gothic"/>
                           <a:cs typeface="Malgun Gothic"/>
                         </a:rPr>
-                        <a:t>it-helpdesk@hanwha-ict.example</a:t>
+                        <a:t>it-helpdesk@ict.example</a:t>
                       </a:r>
                     </a:p>
                   </a:txBody>
@@ -24835,7 +24835,7 @@
                 <a:ea typeface="Malgun Gothic"/>
                 <a:cs typeface="Malgun Gothic"/>
               </a:rPr>
-              <a:t>© HANWHA SYSTEMS ICT · IT-SEC-004 · 사내 일반</a:t>
+              <a:t>© 가상 ICT 기업 · IT-SEC-004 · 사내 일반</a:t>
             </a:r>
           </a:p>
         </p:txBody>
@@ -25083,7 +25083,7 @@
                 <a:ea typeface="Malgun Gothic"/>
                 <a:cs typeface="Malgun Gothic"/>
               </a:rPr>
-              <a:t>© HANWHA SYSTEMS ICT · IT-SEC-004 · 사내 일반</a:t>
+              <a:t>© 가상 ICT 기업 · IT-SEC-004 · 사내 일반</a:t>
             </a:r>
           </a:p>
         </p:txBody>
@@ -27132,7 +27132,7 @@
                 <a:ea typeface="Malgun Gothic"/>
                 <a:cs typeface="Malgun Gothic"/>
               </a:rPr>
-              <a:t>© HANWHA SYSTEMS ICT · IT-SEC-004 · 사내 일반</a:t>
+              <a:t>© 가상 ICT 기업 · IT-SEC-004 · 사내 일반</a:t>
             </a:r>
           </a:p>
         </p:txBody>
@@ -28109,7 +28109,7 @@
                 <a:ea typeface="Malgun Gothic"/>
                 <a:cs typeface="Malgun Gothic"/>
               </a:rPr>
-              <a:t>© HANWHA SYSTEMS ICT · IT-SEC-004 · 사내 일반</a:t>
+              <a:t>© 가상 ICT 기업 · IT-SEC-004 · 사내 일반</a:t>
             </a:r>
           </a:p>
         </p:txBody>
@@ -29385,7 +29385,7 @@
                 <a:ea typeface="Malgun Gothic"/>
                 <a:cs typeface="Malgun Gothic"/>
               </a:rPr>
-              <a:t>© HANWHA SYSTEMS ICT · IT-SEC-004 · 사내 일반</a:t>
+              <a:t>© 가상 ICT 기업 · IT-SEC-004 · 사내 일반</a:t>
             </a:r>
           </a:p>
         </p:txBody>
@@ -29633,7 +29633,7 @@
                 <a:ea typeface="Malgun Gothic"/>
                 <a:cs typeface="Malgun Gothic"/>
               </a:rPr>
-              <a:t>© HANWHA SYSTEMS ICT · IT-SEC-004 · 사내 일반</a:t>
+              <a:t>© 가상 ICT 기업 · IT-SEC-004 · 사내 일반</a:t>
             </a:r>
           </a:p>
         </p:txBody>
@@ -31163,7 +31163,7 @@
                 <a:ea typeface="Malgun Gothic"/>
                 <a:cs typeface="Malgun Gothic"/>
               </a:rPr>
-              <a:t>© HANWHA SYSTEMS ICT · IT-SEC-004 · 사내 일반</a:t>
+              <a:t>© 가상 ICT 기업 · IT-SEC-004 · 사내 일반</a:t>
             </a:r>
           </a:p>
         </p:txBody>
@@ -31411,7 +31411,7 @@
                 <a:ea typeface="Malgun Gothic"/>
                 <a:cs typeface="Malgun Gothic"/>
               </a:rPr>
-              <a:t>© HANWHA SYSTEMS ICT · IT-SEC-004 · 사내 일반</a:t>
+              <a:t>© 가상 ICT 기업 · IT-SEC-004 · 사내 일반</a:t>
             </a:r>
           </a:p>
         </p:txBody>
@@ -33390,7 +33390,7 @@
                 <a:ea typeface="Malgun Gothic"/>
                 <a:cs typeface="Malgun Gothic"/>
               </a:rPr>
-              <a:t>© HANWHA SYSTEMS ICT · IT-SEC-004 · 사내 일반</a:t>
+              <a:t>© 가상 ICT 기업 · IT-SEC-004 · 사내 일반</a:t>
             </a:r>
           </a:p>
         </p:txBody>
@@ -34916,7 +34916,7 @@
                 <a:ea typeface="Malgun Gothic"/>
                 <a:cs typeface="Malgun Gothic"/>
               </a:rPr>
-              <a:t>© HANWHA SYSTEMS ICT · IT-SEC-004 · 사내 일반</a:t>
+              <a:t>© 가상 ICT 기업 · IT-SEC-004 · 사내 일반</a:t>
             </a:r>
           </a:p>
         </p:txBody>
@@ -35164,7 +35164,7 @@
                 <a:ea typeface="Malgun Gothic"/>
                 <a:cs typeface="Malgun Gothic"/>
               </a:rPr>
-              <a:t>© HANWHA SYSTEMS ICT · IT-SEC-004 · 사내 일반</a:t>
+              <a:t>© 가상 ICT 기업 · IT-SEC-004 · 사내 일반</a:t>
             </a:r>
           </a:p>
         </p:txBody>
